--- a/01_분석결과/이니스프리_리브랜딩진단_최종본.pptx
+++ b/01_분석결과/이니스프리_리브랜딩진단_최종본.pptx
@@ -238,19 +238,19 @@
                 <c:formatCode>General</c:formatCode>
                 <c:ptCount val="5"/>
                 <c:pt idx="0">
-                  <c:v>0.79</c:v>
+                  <c:v>0.34</c:v>
                 </c:pt>
                 <c:pt idx="1">
-                  <c:v>1.01</c:v>
+                  <c:v>0.42</c:v>
                 </c:pt>
                 <c:pt idx="2">
-                  <c:v>1.07</c:v>
+                  <c:v>0.5</c:v>
                 </c:pt>
                 <c:pt idx="3">
-                  <c:v>1.33</c:v>
+                  <c:v>0.53</c:v>
                 </c:pt>
                 <c:pt idx="4">
-                  <c:v>1.87</c:v>
+                  <c:v>0.52</c:v>
                 </c:pt>
               </c:numCache>
             </c:numRef>
@@ -1230,7 +1230,7 @@
                   <c:v>-20.6</c:v>
                 </c:pt>
                 <c:pt idx="2">
-                  <c:v>-38.6</c:v>
+                  <c:v>-38.5</c:v>
                 </c:pt>
                 <c:pt idx="3">
                   <c:v>-48.1</c:v>
@@ -5322,7 +5322,7 @@
                 <a:ea typeface="맑은 고딕" pitchFamily="34" charset="-122"/>
                 <a:cs typeface="맑은 고딕" pitchFamily="34" charset="-120"/>
               </a:rPr>
-              <a:t>세분화 5조건 — 4개는 통과, 2개에서 무너졌다</a:t>
+              <a:t>세분화 5조건 — 3개는 통과, 2개에서 무너졌다</a:t>
             </a:r>
             <a:endParaRPr lang="en-US" sz="3000" dirty="0"/>
           </a:p>
@@ -7835,7 +7835,7 @@
                 <a:ea typeface="맑은 고딕" pitchFamily="34" charset="-122"/>
                 <a:cs typeface="맑은 고딕" pitchFamily="34" charset="-120"/>
               </a:rPr>
-              <a:t>토니모리 −5.3%</a:t>
+              <a:t>토니모리 −5.6%</a:t>
             </a:r>
             <a:endParaRPr lang="en-US" sz="1100" dirty="0"/>
           </a:p>
@@ -7991,7 +7991,7 @@
                 <a:ea typeface="맑은 고딕" pitchFamily="34" charset="-122"/>
                 <a:cs typeface="맑은 고딕" pitchFamily="34" charset="-120"/>
               </a:rPr>
-              <a:t>네이버 데이터랩 · 같은 로드샵 카테고리</a:t>
+              <a:t>네이버 데이터랩 · 같은 로드샵 카테고리 · 토니모리는 2021~2025 한정(2026-02부터 붕괴, 1~7월 YoY −53.5% — 대조군 제외, 미샤 −27.1%로 대체)</a:t>
             </a:r>
             <a:endParaRPr lang="en-US" sz="950" dirty="0"/>
           </a:p>
@@ -15098,7 +15098,7 @@
                 <a:ea typeface="맑은 고딕" pitchFamily="34" charset="-122"/>
                 <a:cs typeface="맑은 고딕" pitchFamily="34" charset="-120"/>
               </a:rPr>
-              <a:t>브랜드 검색 대비 제주 연관어(제주·화산송이) 비중 — 3년째 상승 중이다</a:t>
+              <a:t>브랜드 검색 대비 제주 연상 비중('이니스프리 제주' 단독 — 2026-08-19 확정) — 브랜드 전체보다 오래 버텼다(2024년 0.53% 정점, 2025년 0.52% 보합)</a:t>
             </a:r>
             <a:endParaRPr lang="en-US" sz="1200" dirty="0"/>
           </a:p>
